--- a/docs/AutoJopps_Investor_Deck_v2.pptx
+++ b/docs/AutoJopps_Investor_Deck_v2.pptx
@@ -2065,7 +2065,7 @@
                 <a:ea typeface="Arial" pitchFamily="34" charset="-122"/>
                 <a:cs typeface="Arial" pitchFamily="34" charset="-120"/>
               </a:rPr>
-              <a:t>AUTOJOPPS  ·  AUTOMATED JOB OPPORTUNITIES</a:t>
+              <a:t>AUTOJOPPS  ·  AUTOMATED JOB OPPORTUNITIES AND JOB HOPS</a:t>
             </a:r>
             <a:endParaRPr lang="en-US" sz="1100" dirty="0"/>
           </a:p>
@@ -2157,8 +2157,8 @@
         </p:nvSpPr>
         <p:spPr>
           <a:xfrm>
-            <a:off x="548640" y="3749040"/>
-            <a:ext cx="7315200" cy="274320"/>
+            <a:off x="548640" y="3566160"/>
+            <a:ext cx="7680960" cy="457200"/>
           </a:xfrm>
           <a:prstGeom prst="rect">
             <a:avLst/>
@@ -2167,14 +2167,14 @@
           <a:ln/>
         </p:spPr>
         <p:txBody>
-          <a:bodyPr wrap="square" lIns="0" tIns="0" rIns="0" bIns="0" rtlCol="0" anchor="ctr"/>
+          <a:bodyPr wrap="square" lIns="0" tIns="0" rIns="0" bIns="0" rtlCol="0" anchor="t"/>
           <a:lstStyle/>
           <a:p>
             <a:pPr indent="0" marL="0">
               <a:buNone/>
             </a:pPr>
             <a:r>
-              <a:rPr lang="en-US" sz="1100" dirty="0">
+              <a:rPr lang="en-US" sz="1050" i="1" dirty="0">
                 <a:solidFill>
                   <a:srgbClr val="9FD8C9"/>
                 </a:solidFill>
@@ -2182,9 +2182,9 @@
                 <a:ea typeface="Arial" pitchFamily="34" charset="-122"/>
                 <a:cs typeface="Arial" pitchFamily="34" charset="-120"/>
               </a:rPr>
-              <a:t>Working prototype v1 live · github.com/devashishb-rms/Auto-Jopps</a:t>
-            </a:r>
-            <a:endParaRPr lang="en-US" sz="1100" dirty="0"/>
+              <a:t>AutoJopps (auto-J-opps) = Automated Job Opportunities and Job Hops: receive frequent new job opportunities through automated, fast job applies. Also: AutoJobOpps.</a:t>
+            </a:r>
+            <a:endParaRPr lang="en-US" sz="1050" dirty="0"/>
           </a:p>
         </p:txBody>
       </p:sp>
@@ -2196,6 +2196,45 @@
         </p:nvSpPr>
         <p:spPr>
           <a:xfrm>
+            <a:off x="548640" y="4041648"/>
+            <a:ext cx="7315200" cy="274320"/>
+          </a:xfrm>
+          <a:prstGeom prst="rect">
+            <a:avLst/>
+          </a:prstGeom>
+          <a:noFill/>
+          <a:ln/>
+        </p:spPr>
+        <p:txBody>
+          <a:bodyPr wrap="square" lIns="0" tIns="0" rIns="0" bIns="0" rtlCol="0" anchor="ctr"/>
+          <a:lstStyle/>
+          <a:p>
+            <a:pPr indent="0" marL="0">
+              <a:buNone/>
+            </a:pPr>
+            <a:r>
+              <a:rPr lang="en-US" sz="1100" dirty="0">
+                <a:solidFill>
+                  <a:srgbClr val="9FD8C9"/>
+                </a:solidFill>
+                <a:latin typeface="Arial" pitchFamily="34" charset="0"/>
+                <a:ea typeface="Arial" pitchFamily="34" charset="-122"/>
+                <a:cs typeface="Arial" pitchFamily="34" charset="-120"/>
+              </a:rPr>
+              <a:t>Working prototype v1 live · github.com/devashishb-rms/AutoJopps</a:t>
+            </a:r>
+            <a:endParaRPr lang="en-US" sz="1100" dirty="0"/>
+          </a:p>
+        </p:txBody>
+      </p:sp>
+      <p:sp>
+        <p:nvSpPr>
+          <p:cNvPr id="7" name="Text 5"/>
+          <p:cNvSpPr txBox="1"/>
+          <p:nvPr/>
+        </p:nvSpPr>
+        <p:spPr>
+          <a:xfrm>
             <a:off x="548640" y="4343400"/>
             <a:ext cx="7772400" cy="274320"/>
           </a:xfrm>
@@ -2229,7 +2268,7 @@
       </p:sp>
       <p:sp>
         <p:nvSpPr>
-          <p:cNvPr id="7" name="Text 5"/>
+          <p:cNvPr id="8" name="Text 6"/>
           <p:cNvSpPr txBox="1"/>
           <p:nvPr/>
         </p:nvSpPr>
@@ -5739,7 +5778,7 @@
         <p:spPr>
           <a:xfrm>
             <a:off x="548640" y="2011680"/>
-            <a:ext cx="7315200" cy="457200"/>
+            <a:ext cx="7680960" cy="457200"/>
           </a:xfrm>
           <a:prstGeom prst="rect">
             <a:avLst/>
@@ -5763,7 +5802,7 @@
                 <a:ea typeface="Arial" pitchFamily="34" charset="-122"/>
                 <a:cs typeface="Arial" pitchFamily="34" charset="-120"/>
               </a:rPr>
-              <a:t>Job applications on autopilot, with you in the loop.</a:t>
+              <a:t>Automated Job Opportunities and Job Hops. Job applications on autopilot, with you in the loop.</a:t>
             </a:r>
             <a:endParaRPr lang="en-US" sz="1600" dirty="0"/>
           </a:p>
@@ -5842,7 +5881,7 @@
                 <a:ea typeface="Arial" pitchFamily="34" charset="-122"/>
                 <a:cs typeface="Arial" pitchFamily="34" charset="-120"/>
               </a:rPr>
-              <a:t>github.com/devashishb-rms/Auto-Jopps</a:t>
+              <a:t>github.com/devashishb-rms/AutoJopps</a:t>
             </a:r>
             <a:endParaRPr lang="en-US" sz="1200" dirty="0"/>
           </a:p>

--- a/docs/AutoJopps_Investor_Deck_v2.pptx
+++ b/docs/AutoJopps_Investor_Deck_v2.pptx
@@ -2065,7 +2065,7 @@
                 <a:ea typeface="Arial" pitchFamily="34" charset="-122"/>
                 <a:cs typeface="Arial" pitchFamily="34" charset="-120"/>
               </a:rPr>
-              <a:t>AUTOJOPPS  ·  AUTOMATED JOB OPPORTUNITIES AND JOB HOPS</a:t>
+              <a:t>AUTOJOPPS  ·  AUTOMATED NEW JOB OPPORTUNITIES AND SMOOTH JOB-SEARCH OPERATIONS AND JOB HOPS</a:t>
             </a:r>
             <a:endParaRPr lang="en-US" sz="1100" dirty="0"/>
           </a:p>
@@ -2182,7 +2182,7 @@
                 <a:ea typeface="Arial" pitchFamily="34" charset="-122"/>
                 <a:cs typeface="Arial" pitchFamily="34" charset="-120"/>
               </a:rPr>
-              <a:t>AutoJopps (auto-J-opps) = Automated Job Opportunities and Job Hops: receive frequent new job opportunities through automated, fast job applies. Also: AutoJobOpps.</a:t>
+              <a:t>AutoJopps (auto-J-opps) = Automated New Job Opportunities and Smooth Job-Search Operations and Job Hops: receive frequent new job opportunities through automated, fast job applies. Also: AutoJobOpps.</a:t>
             </a:r>
             <a:endParaRPr lang="en-US" sz="1050" dirty="0"/>
           </a:p>
@@ -5802,7 +5802,7 @@
                 <a:ea typeface="Arial" pitchFamily="34" charset="-122"/>
                 <a:cs typeface="Arial" pitchFamily="34" charset="-120"/>
               </a:rPr>
-              <a:t>Automated Job Opportunities and Job Hops. Job applications on autopilot, with you in the loop.</a:t>
+              <a:t>Automated New Job Opportunities and Smooth Job-Search Operations and Job Hops. Job applications on autopilot, with you in the loop.</a:t>
             </a:r>
             <a:endParaRPr lang="en-US" sz="1600" dirty="0"/>
           </a:p>

--- a/docs/AutoJopps_Investor_Deck_v2.pptx
+++ b/docs/AutoJopps_Investor_Deck_v2.pptx
@@ -5864,7 +5864,7 @@
                 <a:ea typeface="Arial" pitchFamily="34" charset="-122"/>
                 <a:cs typeface="Arial" pitchFamily="34" charset="-120"/>
               </a:rPr>
-              <a:t>Devashish Bhattacharjee · devashish.bms@gmail.com · New Delhi</a:t>
+              <a:t>Devashish Bhattacharjee · devashish@autojopps.com · New Delhi</a:t>
             </a:r>
             <a:endParaRPr lang="en-US" sz="1200" dirty="0"/>
           </a:p>
